--- a/docs/user-manual/03-finance.pptx
+++ b/docs/user-manual/03-finance.pptx
@@ -3498,49 +3498,7 @@
                   <a:srgbClr val="D0E3F2"/>
                 </a:solidFill>
               </a:rPr>
-              <a:t>Budgets, FX rates, GRN approvals</a:t>
-            </a:r>
-          </a:p>
-        </p:txBody>
-      </p:sp>
-      <p:sp>
-        <p:nvSpPr>
-          <p:cNvPr id="12" name="TextBox 11"/>
-          <p:cNvSpPr txBox="1"/>
-          <p:nvPr/>
-        </p:nvSpPr>
-        <p:spPr>
-          <a:xfrm>
-            <a:off x="2926080" y="4992624"/>
-            <a:ext cx="6400800" cy="292608"/>
-          </a:xfrm>
-          <a:prstGeom prst="rect">
-            <a:avLst/>
-          </a:prstGeom>
-          <a:noFill/>
-        </p:spPr>
-        <p:txBody>
-          <a:bodyPr wrap="none">
-            <a:spAutoFit/>
-          </a:bodyPr>
-          <a:lstStyle/>
-          <a:p>
-            <a:pPr algn="l"/>
-            <a:r>
-              <a:rPr sz="1100" b="1">
-                <a:solidFill>
-                  <a:srgbClr val="8AB4D8"/>
-                </a:solidFill>
-              </a:rPr>
-              <a:t>Version:  </a:t>
-            </a:r>
-            <a:r>
-              <a:rPr sz="1100">
-                <a:solidFill>
-                  <a:srgbClr val="D0E3F2"/>
-                </a:solidFill>
-              </a:rPr>
-              <a:t>1.0</a:t>
+              <a:t>Budgets, FX rates, GRN approvals, Procurement coordination</a:t>
             </a:r>
           </a:p>
         </p:txBody>
@@ -3972,7 +3930,7 @@
                   <a:srgbClr val="0B4A8A"/>
                 </a:solidFill>
               </a:rPr>
-              <a:t>Your responsibility:</a:t>
+              <a:t>Note:</a:t>
             </a:r>
           </a:p>
           <a:p>
@@ -3987,7 +3945,7 @@
                   <a:srgbClr val="111111"/>
                 </a:solidFill>
               </a:rPr>
-              <a:t>Budget compliance, document verification, FX accuracy, prompt GRN approvals</a:t>
+              <a:t>When a PR reaches pending_finance, Procurement already has read-only visibility via their Incoming PRs view and may be collecting quotes in parallel.</a:t>
             </a:r>
           </a:p>
         </p:txBody>
@@ -4214,6 +4172,39 @@
                 </a:solidFill>
                 <a:latin typeface="Consolas"/>
               </a:rPr>
+              <a:t>      | (Procurement also sees   |</a:t>
+            </a:r>
+          </a:p>
+          <a:p>
+            <a:r>
+              <a:rPr sz="1200">
+                <a:solidFill>
+                  <a:srgbClr val="111111"/>
+                </a:solidFill>
+                <a:latin typeface="Consolas"/>
+              </a:rPr>
+              <a:t>      |  this PR read-only and   |</a:t>
+            </a:r>
+          </a:p>
+          <a:p>
+            <a:r>
+              <a:rPr sz="1200">
+                <a:solidFill>
+                  <a:srgbClr val="111111"/>
+                </a:solidFill>
+                <a:latin typeface="Consolas"/>
+              </a:rPr>
+              <a:t>      |  may be sourcing quotes) |</a:t>
+            </a:r>
+          </a:p>
+          <a:p>
+            <a:r>
+              <a:rPr sz="1200">
+                <a:solidFill>
+                  <a:srgbClr val="111111"/>
+                </a:solidFill>
+                <a:latin typeface="Consolas"/>
+              </a:rPr>
               <a:t>      +--------------------------+</a:t>
             </a:r>
           </a:p>
@@ -4920,6 +4911,91 @@
         <p:spPr>
           <a:xfrm>
             <a:off x="1033272" y="4023360"/>
+            <a:ext cx="10634472" cy="566928"/>
+          </a:xfrm>
+          <a:prstGeom prst="rect">
+            <a:avLst/>
+          </a:prstGeom>
+          <a:noFill/>
+        </p:spPr>
+        <p:txBody>
+          <a:bodyPr wrap="square">
+            <a:spAutoFit/>
+          </a:bodyPr>
+          <a:lstStyle/>
+          <a:p>
+            <a:pPr algn="l"/>
+            <a:r>
+              <a:rPr sz="1300" b="0" i="0">
+                <a:solidFill>
+                  <a:srgbClr val="111111"/>
+                </a:solidFill>
+              </a:rPr>
+              <a:t>If Procurement has flagged a sourcing concern about this PR, factor it in before approving.</a:t>
+            </a:r>
+          </a:p>
+        </p:txBody>
+      </p:sp>
+      <p:sp>
+        <p:nvSpPr>
+          <p:cNvPr id="16" name="Oval 15"/>
+          <p:cNvSpPr/>
+          <p:nvPr/>
+        </p:nvSpPr>
+        <p:spPr>
+          <a:xfrm>
+            <a:off x="502920" y="4645152"/>
+            <a:ext cx="411480" cy="411480"/>
+          </a:xfrm>
+          <a:prstGeom prst="ellipse">
+            <a:avLst/>
+          </a:prstGeom>
+          <a:solidFill>
+            <a:srgbClr val="0B4A8A"/>
+          </a:solidFill>
+          <a:ln>
+            <a:noFill/>
+          </a:ln>
+        </p:spPr>
+        <p:style>
+          <a:lnRef idx="1">
+            <a:schemeClr val="accent1"/>
+          </a:lnRef>
+          <a:fillRef idx="3">
+            <a:schemeClr val="accent1"/>
+          </a:fillRef>
+          <a:effectRef idx="2">
+            <a:schemeClr val="accent1"/>
+          </a:effectRef>
+          <a:fontRef idx="minor">
+            <a:schemeClr val="lt1"/>
+          </a:fontRef>
+        </p:style>
+        <p:txBody>
+          <a:bodyPr rtlCol="0" anchor="ctr"/>
+          <a:lstStyle/>
+          <a:p>
+            <a:pPr algn="ctr"/>
+            <a:r>
+              <a:rPr sz="1200" b="1">
+                <a:solidFill>
+                  <a:srgbClr val="FFFFFF"/>
+                </a:solidFill>
+              </a:rPr>
+              <a:t>7</a:t>
+            </a:r>
+          </a:p>
+        </p:txBody>
+      </p:sp>
+      <p:sp>
+        <p:nvSpPr>
+          <p:cNvPr id="17" name="TextBox 16"/>
+          <p:cNvSpPr txBox="1"/>
+          <p:nvPr/>
+        </p:nvSpPr>
+        <p:spPr>
+          <a:xfrm>
+            <a:off x="1033272" y="4590288"/>
             <a:ext cx="10634472" cy="566928"/>
           </a:xfrm>
           <a:prstGeom prst="rect">
